--- a/docs/presentation_futurisys.pptx
+++ b/docs/presentation_futurisys.pptx
@@ -4782,13 +4782,13 @@
           <a:lstStyle/>
           <a:p>
             <a:r>
-              <a:rPr sz="4000" b="1" i="0">
+              <a:rPr sz="3800" b="1" i="0">
                 <a:solidFill>
                   <a:srgbClr val="FFFFFF"/>
                 </a:solidFill>
                 <a:latin typeface="Arial"/>
               </a:rPr>
-              <a:t>Deploying a Machine Learning Model in Production</a:t>
+              <a:t>Mise en production d'un modèle de Machine Learning</a:t>
             </a:r>
           </a:p>
         </p:txBody>
@@ -4822,7 +4822,7 @@
                 </a:solidFill>
                 <a:latin typeface="Arial"/>
               </a:rPr>
-              <a:t>Futurisys — an API that predicts employee attrition risk</a:t>
+              <a:t>Futurisys — une API qui prédit le risque de départ d'un employé</a:t>
             </a:r>
           </a:p>
         </p:txBody>
@@ -4867,7 +4867,7 @@
                 </a:solidFill>
                 <a:latin typeface="Arial"/>
               </a:rPr>
-              <a:t>OpenClassrooms — Project 5</a:t>
+              <a:t>OpenClassrooms — Projet 5</a:t>
             </a:r>
           </a:p>
           <a:p>
@@ -4878,7 +4878,7 @@
                 </a:solidFill>
                 <a:latin typeface="Arial"/>
               </a:rPr>
-              <a:t>September 2026</a:t>
+              <a:t>Octobre 2026</a:t>
             </a:r>
           </a:p>
         </p:txBody>
@@ -4964,7 +4964,7 @@
                 </a:solidFill>
                 <a:latin typeface="Arial"/>
               </a:rPr>
-              <a:t>Traceability in practice</a:t>
+              <a:t>La traçabilité en pratique</a:t>
             </a:r>
           </a:p>
         </p:txBody>
@@ -5042,7 +5042,7 @@
                 </a:solidFill>
                 <a:latin typeface="Arial"/>
               </a:rPr>
-              <a:t>What happens to every possible outcome</a:t>
+              <a:t>Ce qui est enregistré dans chaque cas de figure</a:t>
             </a:r>
           </a:p>
         </p:txBody>
@@ -5076,7 +5076,7 @@
                 </a:solidFill>
                 <a:latin typeface="Arial"/>
               </a:rPr>
-              <a:t>Futurisys — Deploying an ML model in production</a:t>
+              <a:t>Futurisys — mise en production d'un modèle de ML</a:t>
             </a:r>
           </a:p>
         </p:txBody>
@@ -5152,7 +5152,7 @@
                           </a:solidFill>
                           <a:latin typeface="Arial"/>
                         </a:rPr>
-                        <a:t>Outcome</a:t>
+                        <a:t>Cas</a:t>
                       </a:r>
                     </a:p>
                   </a:txBody>
@@ -5196,7 +5196,7 @@
                           </a:solidFill>
                           <a:latin typeface="Arial"/>
                         </a:rPr>
-                        <a:t>Stored in the database</a:t>
+                        <a:t>Enregistré en base</a:t>
                       </a:r>
                     </a:p>
                   </a:txBody>
@@ -5220,7 +5220,7 @@
                           </a:solidFill>
                           <a:latin typeface="Arial"/>
                         </a:rPr>
-                        <a:t>Success</a:t>
+                        <a:t>Succès</a:t>
                       </a:r>
                     </a:p>
                   </a:txBody>
@@ -5288,7 +5288,7 @@
                           </a:solidFill>
                           <a:latin typeface="Arial"/>
                         </a:rPr>
-                        <a:t>Invalid data</a:t>
+                        <a:t>Données invalides</a:t>
                       </a:r>
                     </a:p>
                   </a:txBody>
@@ -5332,7 +5332,7 @@
                           </a:solidFill>
                           <a:latin typeface="Arial"/>
                         </a:rPr>
-                        <a:t>nothing — the model was never called</a:t>
+                        <a:t>rien — le modèle n'a pas été appelé</a:t>
                       </a:r>
                     </a:p>
                   </a:txBody>
@@ -5356,7 +5356,7 @@
                           </a:solidFill>
                           <a:latin typeface="Arial"/>
                         </a:rPr>
-                        <a:t>Model failure</a:t>
+                        <a:t>Échec du modèle</a:t>
                       </a:r>
                     </a:p>
                   </a:txBody>
@@ -5424,7 +5424,7 @@
                           </a:solidFill>
                           <a:latin typeface="Arial"/>
                         </a:rPr>
-                        <a:t>Database unavailable</a:t>
+                        <a:t>Base indisponible</a:t>
                       </a:r>
                     </a:p>
                   </a:txBody>
@@ -5468,7 +5468,7 @@
                           </a:solidFill>
                           <a:latin typeface="Arial"/>
                         </a:rPr>
-                        <a:t>nothing — and no prediction is returned</a:t>
+                        <a:t>rien — et aucune prédiction n'est renvoyée</a:t>
                       </a:r>
                     </a:p>
                   </a:txBody>
@@ -5517,7 +5517,7 @@
                 </a:solidFill>
                 <a:latin typeface="Arial"/>
               </a:rPr>
-              <a:t>•  Input and output are written in </a:t>
+              <a:t>•  Input et output sont écrits dans </a:t>
             </a:r>
             <a:r>
               <a:rPr sz="1500" b="1" i="0">
@@ -5526,7 +5526,7 @@
                 </a:solidFill>
                 <a:latin typeface="Arial"/>
               </a:rPr>
-              <a:t>one transaction</a:t>
+              <a:t>une seule transaction</a:t>
             </a:r>
             <a:r>
               <a:rPr sz="1500" b="0" i="0">
@@ -5535,7 +5535,7 @@
                 </a:solidFill>
                 <a:latin typeface="Arial"/>
               </a:rPr>
-              <a:t>: an input can never be orphaned</a:t>
+              <a:t> : un input ne peut pas rester orphelin</a:t>
             </a:r>
           </a:p>
           <a:p>
@@ -5551,7 +5551,7 @@
                 </a:solidFill>
                 <a:latin typeface="Arial"/>
               </a:rPr>
-              <a:t>•  A CHECK makes “success without a probability” or “error without a message” </a:t>
+              <a:t>•  Un CHECK rend </a:t>
             </a:r>
             <a:r>
               <a:rPr sz="1500" b="1" i="0">
@@ -5561,6 +5561,15 @@
                 <a:latin typeface="Arial"/>
               </a:rPr>
               <a:t>impossible</a:t>
+            </a:r>
+            <a:r>
+              <a:rPr sz="1500" b="0" i="0">
+                <a:solidFill>
+                  <a:srgbClr val="2B2B2B"/>
+                </a:solidFill>
+                <a:latin typeface="Arial"/>
+              </a:rPr>
+              <a:t> « succès sans probabilité » ou « erreur sans message »</a:t>
             </a:r>
           </a:p>
           <a:p>
@@ -5576,7 +5585,7 @@
                 </a:solidFill>
                 <a:latin typeface="Arial"/>
               </a:rPr>
-              <a:t>•  Evidence: db/verify.sql lists each call with its probability, timestamp and model version</a:t>
+              <a:t>•  Preuve : db/verify.sql liste chaque appel avec sa probabilité, sa date et la version du modèle</a:t>
             </a:r>
           </a:p>
         </p:txBody>
@@ -5628,7 +5637,7 @@
                 </a:solidFill>
                 <a:latin typeface="Arial"/>
               </a:rPr>
-              <a:t>Loading the dataset</a:t>
+              <a:t>Chargement du dataset</a:t>
             </a:r>
           </a:p>
         </p:txBody>
@@ -5706,7 +5715,7 @@
                 </a:solidFill>
                 <a:latin typeface="Arial"/>
               </a:rPr>
-              <a:t>Two scripts, both safe to re-run</a:t>
+              <a:t>Deux scripts, relançables sans risque</a:t>
             </a:r>
           </a:p>
         </p:txBody>
@@ -5740,7 +5749,7 @@
                 </a:solidFill>
                 <a:latin typeface="Arial"/>
               </a:rPr>
-              <a:t>Futurisys — Deploying an ML model in production</a:t>
+              <a:t>Futurisys — mise en production d'un modèle de ML</a:t>
             </a:r>
           </a:p>
         </p:txBody>
@@ -5832,7 +5841,7 @@
                 </a:solidFill>
                 <a:latin typeface="Arial"/>
               </a:rPr>
-              <a:t> — creates the database, the 6 tables, and registers the model version</a:t>
+              <a:t> — crée la base, les 6 tables, et enregistre la version du modèle</a:t>
             </a:r>
           </a:p>
           <a:p>
@@ -5866,7 +5875,7 @@
                 </a:solidFill>
                 <a:latin typeface="Arial"/>
               </a:rPr>
-              <a:t> — loads the 3 HR source files: 1 470 rows in each table</a:t>
+              <a:t> — charge les 3 fichiers RH source : 1 470 lignes dans chaque table</a:t>
             </a:r>
           </a:p>
         </p:txBody>
@@ -5907,7 +5916,7 @@
                           </a:solidFill>
                           <a:latin typeface="Arial"/>
                         </a:rPr>
-                        <a:t>Source file</a:t>
+                        <a:t>Fichier source</a:t>
                       </a:r>
                     </a:p>
                   </a:txBody>
@@ -5929,7 +5938,7 @@
                           </a:solidFill>
                           <a:latin typeface="Arial"/>
                         </a:rPr>
-                        <a:t>Conversion applied</a:t>
+                        <a:t>Conversion appliquée</a:t>
                       </a:r>
                     </a:p>
                   </a:txBody>
@@ -5951,7 +5960,7 @@
                           </a:solidFill>
                           <a:latin typeface="Arial"/>
                         </a:rPr>
-                        <a:t>Why</a:t>
+                        <a:t>Pourquoi</a:t>
                       </a:r>
                     </a:p>
                   </a:txBody>
@@ -5997,7 +6006,7 @@
                           </a:solidFill>
                           <a:latin typeface="Arial"/>
                         </a:rPr>
-                        <a:t>eval_number “E_123” → 123</a:t>
+                        <a:t>eval_number « E_123 » → 123</a:t>
                       </a:r>
                     </a:p>
                   </a:txBody>
@@ -6019,7 +6028,7 @@
                           </a:solidFill>
                           <a:latin typeface="Arial"/>
                         </a:rPr>
-                        <a:t>one integer key across the 3 files</a:t>
+                        <a:t>une seule clé entière pour les 3 fichiers</a:t>
                       </a:r>
                     </a:p>
                   </a:txBody>
@@ -6087,7 +6096,7 @@
                           </a:solidFill>
                           <a:latin typeface="Arial"/>
                         </a:rPr>
-                        <a:t>same key everywhere</a:t>
+                        <a:t>la même clé partout</a:t>
                       </a:r>
                     </a:p>
                   </a:txBody>
@@ -6133,7 +6142,7 @@
                           </a:solidFill>
                           <a:latin typeface="Arial"/>
                         </a:rPr>
-                        <a:t>“11 %” → 11.0</a:t>
+                        <a:t>« 11 % » → 11.0</a:t>
                       </a:r>
                     </a:p>
                   </a:txBody>
@@ -6155,7 +6164,7 @@
                           </a:solidFill>
                           <a:latin typeface="Arial"/>
                         </a:rPr>
-                        <a:t>a number can be computed with</a:t>
+                        <a:t>un nombre, avec lequel on peut calculer</a:t>
                       </a:r>
                     </a:p>
                   </a:txBody>
@@ -6201,7 +6210,7 @@
                           </a:solidFill>
                           <a:latin typeface="Arial"/>
                         </a:rPr>
-                        <a:t>“Oui” / “Non” → true / false</a:t>
+                        <a:t>« Oui » / « Non » → true / false</a:t>
                       </a:r>
                     </a:p>
                   </a:txBody>
@@ -6223,7 +6232,7 @@
                           </a:solidFill>
                           <a:latin typeface="Arial"/>
                         </a:rPr>
-                        <a:t>the target as a boolean</a:t>
+                        <a:t>la cible en booléen</a:t>
                       </a:r>
                     </a:p>
                   </a:txBody>
@@ -6272,7 +6281,7 @@
                 </a:solidFill>
                 <a:latin typeface="Arial"/>
               </a:rPr>
-              <a:t>•  The import </a:t>
+              <a:t>•  L'import </a:t>
             </a:r>
             <a:r>
               <a:rPr sz="1400" b="1" i="0">
@@ -6281,7 +6290,7 @@
                 </a:solidFill>
                 <a:latin typeface="Arial"/>
               </a:rPr>
-              <a:t>verifies the 3 files describe the same employees</a:t>
+              <a:t>vérifie que les 3 fichiers décrivent les mêmes employés</a:t>
             </a:r>
             <a:r>
               <a:rPr sz="1400" b="0" i="0">
@@ -6290,7 +6299,7 @@
                 </a:solidFill>
                 <a:latin typeface="Arial"/>
               </a:rPr>
-              <a:t> — a misaligned id would pair one person's data with another's outcome, silently</a:t>
+              <a:t> — un identifiant décalé associerait les données d'une personne au départ d'une autre, silencieusement</a:t>
             </a:r>
           </a:p>
           <a:p>
@@ -6306,7 +6315,7 @@
                 </a:solidFill>
                 <a:latin typeface="Arial"/>
               </a:rPr>
-              <a:t>•  One single transaction: </a:t>
+              <a:t>•  Une seule transaction : </a:t>
             </a:r>
             <a:r>
               <a:rPr sz="1400" b="1" i="0">
@@ -6315,7 +6324,7 @@
                 </a:solidFill>
                 <a:latin typeface="Arial"/>
               </a:rPr>
-              <a:t>all 1 470 rows or none</a:t>
+              <a:t>les 1 470 lignes ou aucune</a:t>
             </a:r>
             <a:r>
               <a:rPr sz="1400" b="0" i="0">
@@ -6324,7 +6333,7 @@
                 </a:solidFill>
                 <a:latin typeface="Arial"/>
               </a:rPr>
-              <a:t> — never a half-loaded, biased dataset</a:t>
+              <a:t> — jamais un dataset à moitié chargé, donc biaisé</a:t>
             </a:r>
           </a:p>
         </p:txBody>
@@ -6376,7 +6385,7 @@
                 </a:solidFill>
                 <a:latin typeface="Arial"/>
               </a:rPr>
-              <a:t>Testing strategy</a:t>
+              <a:t>Stratégie de tests</a:t>
             </a:r>
           </a:p>
         </p:txBody>
@@ -6454,7 +6463,7 @@
                 </a:solidFill>
                 <a:latin typeface="Arial"/>
               </a:rPr>
-              <a:t>65 tests · 86% coverage · no PostgreSQL required</a:t>
+              <a:t>65 tests · 86 % de couverture · aucun PostgreSQL requis</a:t>
             </a:r>
           </a:p>
         </p:txBody>
@@ -6488,7 +6497,7 @@
                 </a:solidFill>
                 <a:latin typeface="Arial"/>
               </a:rPr>
-              <a:t>Futurisys — Deploying an ML model in production</a:t>
+              <a:t>Futurisys — mise en production d'un modèle de ML</a:t>
             </a:r>
           </a:p>
         </p:txBody>
@@ -6547,10 +6556,10 @@
                 <a:tableStyleId>{5C22544A-7EE6-4342-B048-85BDC9FD1C3A}</a:tableStyleId>
               </a:tblPr>
               <a:tblGrid>
-                <a:gridCol w="2743200"/>
+                <a:gridCol w="2926080"/>
                 <a:gridCol w="4206240"/>
                 <a:gridCol w="1005840"/>
-                <a:gridCol w="3108960"/>
+                <a:gridCol w="2926080"/>
               </a:tblGrid>
               <a:tr h="502920">
                 <a:tc>
@@ -6565,7 +6574,7 @@
                           </a:solidFill>
                           <a:latin typeface="Arial"/>
                         </a:rPr>
-                        <a:t>Level</a:t>
+                        <a:t>Niveau</a:t>
                       </a:r>
                     </a:p>
                   </a:txBody>
@@ -6587,7 +6596,7 @@
                           </a:solidFill>
                           <a:latin typeface="Arial"/>
                         </a:rPr>
-                        <a:t>Files</a:t>
+                        <a:t>Fichiers</a:t>
                       </a:r>
                     </a:p>
                   </a:txBody>
@@ -6631,7 +6640,7 @@
                           </a:solidFill>
                           <a:latin typeface="Arial"/>
                         </a:rPr>
-                        <a:t>What it proves</a:t>
+                        <a:t>Ce qui est prouvé</a:t>
                       </a:r>
                     </a:p>
                   </a:txBody>
@@ -6655,7 +6664,7 @@
                           </a:solidFill>
                           <a:latin typeface="Arial"/>
                         </a:rPr>
-                        <a:t>Unit — model side</a:t>
+                        <a:t>Unitaire — côté modèle</a:t>
                       </a:r>
                     </a:p>
                   </a:txBody>
@@ -6721,7 +6730,7 @@
                           </a:solidFill>
                           <a:latin typeface="Arial"/>
                         </a:rPr>
-                        <a:t>validation, formulas, threshold</a:t>
+                        <a:t>validation, formules, seuil</a:t>
                       </a:r>
                     </a:p>
                   </a:txBody>
@@ -6745,7 +6754,7 @@
                           </a:solidFill>
                           <a:latin typeface="Arial"/>
                         </a:rPr>
-                        <a:t>Unit — database side</a:t>
+                        <a:t>Unitaire — côté base</a:t>
                       </a:r>
                     </a:p>
                   </a:txBody>
@@ -6811,7 +6820,7 @@
                           </a:solidFill>
                           <a:latin typeface="Arial"/>
                         </a:rPr>
-                        <a:t>constraints, creation, import</a:t>
+                        <a:t>contraintes, création, import</a:t>
                       </a:r>
                     </a:p>
                   </a:txBody>
@@ -6835,7 +6844,7 @@
                           </a:solidFill>
                           <a:latin typeface="Arial"/>
                         </a:rPr>
-                        <a:t>Functional — API</a:t>
+                        <a:t>Fonctionnel — API</a:t>
                       </a:r>
                     </a:p>
                   </a:txBody>
@@ -6901,7 +6910,7 @@
                           </a:solidFill>
                           <a:latin typeface="Arial"/>
                         </a:rPr>
-                        <a:t>routes + traceability + failures</a:t>
+                        <a:t>routes + traçabilité + pannes</a:t>
                       </a:r>
                     </a:p>
                   </a:txBody>
@@ -6950,7 +6959,7 @@
                 </a:solidFill>
                 <a:latin typeface="Arial"/>
               </a:rPr>
-              <a:t>•  Tests run against an </a:t>
+              <a:t>•  Les tests tournent sur une base </a:t>
             </a:r>
             <a:r>
               <a:rPr sz="1500" b="1" i="0">
@@ -6959,7 +6968,7 @@
                 </a:solidFill>
                 <a:latin typeface="Arial"/>
               </a:rPr>
-              <a:t>in-memory SQLite</a:t>
+              <a:t>SQLite en mémoire</a:t>
             </a:r>
             <a:r>
               <a:rPr sz="1500" b="0" i="0">
@@ -6968,7 +6977,7 @@
                 </a:solidFill>
                 <a:latin typeface="Arial"/>
               </a:rPr>
-              <a:t> database, created and destroyed per test</a:t>
+              <a:t>, créée puis détruite à chaque test</a:t>
             </a:r>
           </a:p>
           <a:p>
@@ -6984,7 +6993,7 @@
                 </a:solidFill>
                 <a:latin typeface="Arial"/>
               </a:rPr>
-              <a:t>     –  FastAPI's dependency_overrides swaps the real session for the test one</a:t>
+              <a:t>     –  dependency_overrides de FastAPI remplace la session réelle par celle de test</a:t>
             </a:r>
           </a:p>
           <a:p>
@@ -7000,7 +7009,7 @@
                 </a:solidFill>
                 <a:latin typeface="Arial"/>
               </a:rPr>
-              <a:t>•  So the suite runs in </a:t>
+              <a:t>•  La suite tourne donc dans </a:t>
             </a:r>
             <a:r>
               <a:rPr sz="1500" b="1" i="0">
@@ -7018,7 +7027,7 @@
                 </a:solidFill>
                 <a:latin typeface="Arial"/>
               </a:rPr>
-              <a:t> with no database server, and never touches real data</a:t>
+              <a:t> sans serveur de base, et ne touche jamais aux vraies données</a:t>
             </a:r>
           </a:p>
           <a:p>
@@ -7043,7 +7052,7 @@
                 </a:solidFill>
                 <a:latin typeface="Arial"/>
               </a:rPr>
-              <a:t>Known limit:</a:t>
+              <a:t>Limite assumée :</a:t>
             </a:r>
             <a:r>
               <a:rPr sz="1500" b="0" i="0">
@@ -7052,7 +7061,7 @@
                 </a:solidFill>
                 <a:latin typeface="Arial"/>
               </a:rPr>
-              <a:t> SQLite is not PostgreSQL — the real schema is verified separately with db/verify.sql</a:t>
+              <a:t> SQLite n'est pas PostgreSQL — le schéma réel est vérifié à part avec db/verify.sql</a:t>
             </a:r>
           </a:p>
         </p:txBody>
@@ -7104,7 +7113,7 @@
                 </a:solidFill>
                 <a:latin typeface="Arial"/>
               </a:rPr>
-              <a:t>Continuous integration and delivery</a:t>
+              <a:t>Intégration et déploiement continus</a:t>
             </a:r>
           </a:p>
         </p:txBody>
@@ -7182,7 +7191,7 @@
                 </a:solidFill>
                 <a:latin typeface="Arial"/>
               </a:rPr>
-              <a:t>Futurisys — Deploying an ML model in production</a:t>
+              <a:t>Futurisys — mise en production d'un modèle de ML</a:t>
             </a:r>
           </a:p>
         </p:txBody>
@@ -7282,7 +7291,7 @@
                 <a:latin typeface="Arial"/>
               </a:rPr>
               <a:t>
-install dependencies
+installe les dépendances
 Python 3.11</a:t>
             </a:r>
           </a:p>
@@ -7392,7 +7401,7 @@
                 <a:latin typeface="Arial"/>
               </a:rPr>
               <a:t>
-65 tests + coverage</a:t>
+65 tests + couverture</a:t>
             </a:r>
           </a:p>
         </p:txBody>
@@ -7501,8 +7510,8 @@
                 <a:latin typeface="Arial"/>
               </a:rPr>
               <a:t>
-push to Hugging Face
-(main only)</a:t>
+envoi vers Hugging Face
+(uniquement main)</a:t>
             </a:r>
           </a:p>
         </p:txBody>
@@ -7557,7 +7566,7 @@
                 </a:solidFill>
                 <a:latin typeface="Arial"/>
               </a:rPr>
-              <a:t>Incident — 24 September 2026:</a:t>
+              <a:t>Incident — 24 septembre 2026 :</a:t>
             </a:r>
             <a:r>
               <a:rPr sz="1400" b="0" i="0">
@@ -7566,8 +7575,8 @@
                 </a:solidFill>
                 <a:latin typeface="Arial"/>
               </a:rPr>
-              <a:t> the deployment broke with zero change to my code.
-The action installed the latest Hugging Face CLI, and version 2.0.0 renamed hf repo into hf repos.
+              <a:t> le déploiement a cassé sans aucune modification de mon code.
+L'action installait la dernière version du CLI Hugging Face, et la 2.0.0 a renommé « hf repo » en « hf repos ».
 </a:t>
             </a:r>
             <a:r>
@@ -7577,7 +7586,7 @@
                 </a:solidFill>
                 <a:latin typeface="Arial"/>
               </a:rPr>
-              <a:t>Fix:</a:t>
+              <a:t>Correction :</a:t>
             </a:r>
             <a:r>
               <a:rPr sz="1400" b="0" i="0">
@@ -7586,7 +7595,7 @@
                 </a:solidFill>
                 <a:latin typeface="Arial"/>
               </a:rPr>
-              <a:t> action bumped to v0.3.0 </a:t>
+              <a:t> action passée en v0.3.0 </a:t>
             </a:r>
             <a:r>
               <a:rPr sz="1400" b="1" i="0">
@@ -7595,7 +7604,7 @@
                 </a:solidFill>
                 <a:latin typeface="Arial"/>
               </a:rPr>
-              <a:t>and</a:t>
+              <a:t>et</a:t>
             </a:r>
             <a:r>
               <a:rPr sz="1400" b="0" i="0">
@@ -7604,7 +7613,7 @@
                 </a:solidFill>
                 <a:latin typeface="Arial"/>
               </a:rPr>
-              <a:t> the CLI version pinned, so a future release cannot break it again.</a:t>
+              <a:t> version du CLI figée, pour qu'une future publication ne puisse plus la casser.</a:t>
             </a:r>
           </a:p>
         </p:txBody>
@@ -7652,7 +7661,7 @@
                 </a:solidFill>
                 <a:latin typeface="Arial"/>
               </a:rPr>
-              <a:t>Lesson:</a:t>
+              <a:t>Leçon :</a:t>
             </a:r>
             <a:r>
               <a:rPr sz="1500" b="0" i="0">
@@ -7661,7 +7670,7 @@
                 </a:solidFill>
                 <a:latin typeface="Arial"/>
               </a:rPr>
-              <a:t> pin every dependency — libraries (requirements.txt), the model's own versions, and the deployment tools</a:t>
+              <a:t> figer toutes les dépendances — les librairies (requirements.txt), les versions enregistrées avec le modèle, et les outils de déploiement</a:t>
             </a:r>
           </a:p>
         </p:txBody>
@@ -7713,7 +7722,7 @@
                 </a:solidFill>
                 <a:latin typeface="Arial"/>
               </a:rPr>
-              <a:t>Deployment choice</a:t>
+              <a:t>Choix de déploiement</a:t>
             </a:r>
           </a:p>
         </p:txBody>
@@ -7791,7 +7800,7 @@
                 </a:solidFill>
                 <a:latin typeface="Arial"/>
               </a:rPr>
-              <a:t>The API is public, the database stays local — deliberately</a:t>
+              <a:t>L'API est publique, la base reste locale — volontairement</a:t>
             </a:r>
           </a:p>
         </p:txBody>
@@ -7825,7 +7834,7 @@
                 </a:solidFill>
                 <a:latin typeface="Arial"/>
               </a:rPr>
-              <a:t>Futurisys — Deploying an ML model in production</a:t>
+              <a:t>Futurisys — mise en production d'un modèle de ML</a:t>
             </a:r>
           </a:p>
         </p:txBody>
@@ -7899,7 +7908,7 @@
                 </a:solidFill>
                 <a:latin typeface="Arial"/>
               </a:rPr>
-              <a:t>•  The API runs in a </a:t>
+              <a:t>•  L'API tourne dans un conteneur </a:t>
             </a:r>
             <a:r>
               <a:rPr sz="1600" b="1" i="0">
@@ -7917,7 +7926,7 @@
                 </a:solidFill>
                 <a:latin typeface="Arial"/>
               </a:rPr>
-              <a:t> container on a </a:t>
+              <a:t> sur un </a:t>
             </a:r>
             <a:r>
               <a:rPr sz="1600" b="1" i="0">
@@ -7926,7 +7935,7 @@
                 </a:solidFill>
                 <a:latin typeface="Arial"/>
               </a:rPr>
-              <a:t>Hugging Face Space</a:t>
+              <a:t>Space Hugging Face</a:t>
             </a:r>
             <a:r>
               <a:rPr sz="1600" b="0" i="0">
@@ -7935,7 +7944,7 @@
                 </a:solidFill>
                 <a:latin typeface="Arial"/>
               </a:rPr>
-              <a:t> (status: running)</a:t>
+              <a:t> (statut : en ligne)</a:t>
             </a:r>
           </a:p>
           <a:p>
@@ -7951,7 +7960,7 @@
                 </a:solidFill>
                 <a:latin typeface="Arial"/>
               </a:rPr>
-              <a:t>•  /, /health and /docs work online; </a:t>
+              <a:t>•  / , /health et /docs fonctionnent en ligne ; </a:t>
             </a:r>
             <a:r>
               <a:rPr sz="1600" b="1" i="0">
@@ -7960,7 +7969,7 @@
                 </a:solidFill>
                 <a:latin typeface="Arial"/>
               </a:rPr>
-              <a:t>/predict returns 503</a:t>
+              <a:t>/predict renvoie 503</a:t>
             </a:r>
             <a:r>
               <a:rPr sz="1600" b="0" i="0">
@@ -7969,7 +7978,7 @@
                 </a:solidFill>
                 <a:latin typeface="Arial"/>
               </a:rPr>
-              <a:t> there</a:t>
+              <a:t> là-bas</a:t>
             </a:r>
           </a:p>
           <a:p>
@@ -7985,7 +7994,7 @@
                 </a:solidFill>
                 <a:latin typeface="Arial"/>
               </a:rPr>
-              <a:t>•  That is documented behaviour, not a bug: </a:t>
+              <a:t>•  C'est un comportement documenté, pas un bug : </a:t>
             </a:r>
             <a:r>
               <a:rPr sz="1600" b="1" i="0">
@@ -7994,7 +8003,7 @@
                 </a:solidFill>
                 <a:latin typeface="Arial"/>
               </a:rPr>
-              <a:t>no traceability, no prediction</a:t>
+              <a:t>pas de traçabilité, pas de prédiction</a:t>
             </a:r>
           </a:p>
         </p:txBody>
@@ -8034,7 +8043,7 @@
                           </a:solidFill>
                           <a:latin typeface="Arial"/>
                         </a:rPr>
-                        <a:t>Why the database is not hosted online</a:t>
+                        <a:t>Pourquoi la base n'est pas hébergée en ligne</a:t>
                       </a:r>
                     </a:p>
                   </a:txBody>
@@ -8056,7 +8065,7 @@
                           </a:solidFill>
                           <a:latin typeface="Arial"/>
                         </a:rPr>
-                        <a:t>Consequence</a:t>
+                        <a:t>Conséquence</a:t>
                       </a:r>
                     </a:p>
                   </a:txBody>
@@ -8080,7 +8089,7 @@
                           </a:solidFill>
                           <a:latin typeface="Arial"/>
                         </a:rPr>
-                        <a:t>The data is personal HR data (GDPR)</a:t>
+                        <a:t>Ce sont des données RH personnelles (RGPD)</a:t>
                       </a:r>
                     </a:p>
                   </a:txBody>
@@ -8102,7 +8111,7 @@
                           </a:solidFill>
                           <a:latin typeface="Arial"/>
                         </a:rPr>
-                        <a:t>it must not be copied to a free third-party service</a:t>
+                        <a:t>elles ne doivent pas être copiées chez un tiers gratuit</a:t>
                       </a:r>
                     </a:p>
                   </a:txBody>
@@ -8126,7 +8135,7 @@
                           </a:solidFill>
                           <a:latin typeface="Arial"/>
                         </a:rPr>
-                        <a:t>A Space's disk is not persistent</a:t>
+                        <a:t>Le disque d'un Space n'est pas persistant</a:t>
                       </a:r>
                     </a:p>
                   </a:txBody>
@@ -8148,7 +8157,7 @@
                           </a:solidFill>
                           <a:latin typeface="Arial"/>
                         </a:rPr>
-                        <a:t>the history would be wiped at every restart</a:t>
+                        <a:t>l'historique serait effacé à chaque redémarrage</a:t>
                       </a:r>
                     </a:p>
                   </a:txBody>
@@ -8172,7 +8181,7 @@
                           </a:solidFill>
                           <a:latin typeface="Arial"/>
                         </a:rPr>
-                        <a:t>The brief allows a local-only database</a:t>
+                        <a:t>Le cahier des charges autorise une base locale</a:t>
                       </a:r>
                     </a:p>
                   </a:txBody>
@@ -8194,7 +8203,7 @@
                           </a:solidFill>
                           <a:latin typeface="Arial"/>
                         </a:rPr>
-                        <a:t>the full pipeline is demonstrated locally</a:t>
+                        <a:t>la chaîne complète est démontrée en local</a:t>
                       </a:r>
                     </a:p>
                   </a:txBody>
@@ -8238,7 +8247,7 @@
                 </a:solidFill>
                 <a:latin typeface="Arial"/>
               </a:rPr>
-              <a:t>Reversible by design: providing a DATABASE_URL secret to the Space is enough — no code change.</a:t>
+              <a:t>Décision réversible par construction : fournir une variable secrète DATABASE_URL au Space suffirait — aucun changement de code.</a:t>
             </a:r>
           </a:p>
         </p:txBody>
@@ -8290,7 +8299,7 @@
                 </a:solidFill>
                 <a:latin typeface="Arial"/>
               </a:rPr>
-              <a:t>Security and personal data</a:t>
+              <a:t>Sécurité et données personnelles</a:t>
             </a:r>
           </a:p>
         </p:txBody>
@@ -8368,7 +8377,7 @@
                 </a:solidFill>
                 <a:latin typeface="Arial"/>
               </a:rPr>
-              <a:t>Futurisys — Deploying an ML model in production</a:t>
+              <a:t>Futurisys — mise en production d'un modèle de ML</a:t>
             </a:r>
           </a:p>
         </p:txBody>
@@ -8443,7 +8452,7 @@
                           </a:solidFill>
                           <a:latin typeface="Arial"/>
                         </a:rPr>
-                        <a:t>Risk</a:t>
+                        <a:t>Risque</a:t>
                       </a:r>
                     </a:p>
                   </a:txBody>
@@ -8465,7 +8474,7 @@
                           </a:solidFill>
                           <a:latin typeface="Arial"/>
                         </a:rPr>
-                        <a:t>Measure taken</a:t>
+                        <a:t>Mesure prise</a:t>
                       </a:r>
                     </a:p>
                   </a:txBody>
@@ -8489,7 +8498,7 @@
                           </a:solidFill>
                           <a:latin typeface="Arial"/>
                         </a:rPr>
-                        <a:t>Password leaked in git</a:t>
+                        <a:t>Mot de passe exposé dans git</a:t>
                       </a:r>
                     </a:p>
                   </a:txBody>
@@ -8511,7 +8520,7 @@
                           </a:solidFill>
                           <a:latin typeface="Arial"/>
                         </a:rPr>
-                        <a:t>.env ignored by git and Docker; .env.example holds a fake value</a:t>
+                        <a:t>.env ignoré par git et Docker ; .env.example ne contient qu'une valeur factice</a:t>
                       </a:r>
                     </a:p>
                   </a:txBody>
@@ -8535,7 +8544,7 @@
                           </a:solidFill>
                           <a:latin typeface="Arial"/>
                         </a:rPr>
-                        <a:t>HR data leaked</a:t>
+                        <a:t>Données RH exposées</a:t>
                       </a:r>
                     </a:p>
                   </a:txBody>
@@ -8557,7 +8566,7 @@
                           </a:solidFill>
                           <a:latin typeface="Arial"/>
                         </a:rPr>
-                        <a:t>data/ (CSV + notebook) excluded from git and from the image</a:t>
+                        <a:t>data/ (CSV + notebook) exclu de git et de l'image Docker</a:t>
                       </a:r>
                     </a:p>
                   </a:txBody>
@@ -8581,7 +8590,7 @@
                           </a:solidFill>
                           <a:latin typeface="Arial"/>
                         </a:rPr>
-                        <a:t>Over-privileged access</a:t>
+                        <a:t>Droits trop larges sur la base</a:t>
                       </a:r>
                     </a:p>
                   </a:txBody>
@@ -8603,7 +8612,7 @@
                           </a:solidFill>
                           <a:latin typeface="Arial"/>
                         </a:rPr>
-                        <a:t>a dedicated PostgreSQL role, not the postgres superuser</a:t>
+                        <a:t>un rôle PostgreSQL dédié, et non le superutilisateur postgres</a:t>
                       </a:r>
                     </a:p>
                   </a:txBody>
@@ -8627,7 +8636,7 @@
                           </a:solidFill>
                           <a:latin typeface="Arial"/>
                         </a:rPr>
-                        <a:t>Corrupted or invalid data</a:t>
+                        <a:t>Données invalides ou incohérentes</a:t>
                       </a:r>
                     </a:p>
                   </a:txBody>
@@ -8649,7 +8658,7 @@
                           </a:solidFill>
                           <a:latin typeface="Arial"/>
                         </a:rPr>
-                        <a:t>CHECK, NOT NULL, UNIQUE and foreign keys in the database</a:t>
+                        <a:t>CHECK, NOT NULL, UNIQUE et clés étrangères dans la base</a:t>
                       </a:r>
                     </a:p>
                   </a:txBody>
@@ -8673,7 +8682,7 @@
                           </a:solidFill>
                           <a:latin typeface="Arial"/>
                         </a:rPr>
-                        <a:t>Database exposed</a:t>
+                        <a:t>Base exposée sur le réseau</a:t>
                       </a:r>
                     </a:p>
                   </a:txBody>
@@ -8695,7 +8704,7 @@
                           </a:solidFill>
                           <a:latin typeface="Arial"/>
                         </a:rPr>
-                        <a:t>PostgreSQL listens on localhost only</a:t>
+                        <a:t>PostgreSQL n'écoute que sur localhost</a:t>
                       </a:r>
                     </a:p>
                   </a:txBody>
@@ -8719,7 +8728,7 @@
                           </a:solidFill>
                           <a:latin typeface="Arial"/>
                         </a:rPr>
-                        <a:t>Silent failures</a:t>
+                        <a:t>Pannes silencieuses</a:t>
                       </a:r>
                     </a:p>
                   </a:txBody>
@@ -8741,7 +8750,7 @@
                           </a:solidFill>
                           <a:latin typeface="Arial"/>
                         </a:rPr>
-                        <a:t>model errors stored with their message (status = error)</a:t>
+                        <a:t>les erreurs du modèle sont enregistrées avec leur message (status = error)</a:t>
                       </a:r>
                     </a:p>
                   </a:txBody>
@@ -8799,7 +8808,7 @@
                 </a:solidFill>
                 <a:latin typeface="Arial"/>
               </a:rPr>
-              <a:t>Stated limit:</a:t>
+              <a:t>Limite assumée :</a:t>
             </a:r>
             <a:r>
               <a:rPr sz="1400" b="0" i="0">
@@ -8808,7 +8817,7 @@
                 </a:solidFill>
                 <a:latin typeface="Arial"/>
               </a:rPr>
-              <a:t> /predict has no authentication yet — acceptable while unreachable from the internet, an API key would be required otherwise</a:t>
+              <a:t> /predict n'a pas encore d'authentification — acceptable tant que l'endpoint n'est pas joignable depuis internet, une clé d'API serait sinon indispensable</a:t>
             </a:r>
           </a:p>
         </p:txBody>
@@ -8860,7 +8869,7 @@
                 </a:solidFill>
                 <a:latin typeface="Arial"/>
               </a:rPr>
-              <a:t>Difficulties and what they taught me</a:t>
+              <a:t>Difficultés rencontrées et enseignements</a:t>
             </a:r>
           </a:p>
         </p:txBody>
@@ -8938,7 +8947,7 @@
                 </a:solidFill>
                 <a:latin typeface="Arial"/>
               </a:rPr>
-              <a:t>Futurisys — Deploying an ML model in production</a:t>
+              <a:t>Futurisys — mise en production d'un modèle de ML</a:t>
             </a:r>
           </a:p>
         </p:txBody>
@@ -9013,7 +9022,7 @@
                           </a:solidFill>
                           <a:latin typeface="Arial"/>
                         </a:rPr>
-                        <a:t>Difficulty</a:t>
+                        <a:t>Difficulté</a:t>
                       </a:r>
                     </a:p>
                   </a:txBody>
@@ -9035,7 +9044,7 @@
                           </a:solidFill>
                           <a:latin typeface="Arial"/>
                         </a:rPr>
-                        <a:t>Resolution</a:t>
+                        <a:t>Résolution</a:t>
                       </a:r>
                     </a:p>
                   </a:txBody>
@@ -9059,7 +9068,7 @@
                           </a:solidFill>
                           <a:latin typeface="Arial"/>
                         </a:rPr>
-                        <a:t>The feature formulas existed only in the training notebook</a:t>
+                        <a:t>Les formules des features n'existaient que dans le notebook</a:t>
                       </a:r>
                     </a:p>
                   </a:txBody>
@@ -9081,7 +9090,7 @@
                           </a:solidFill>
                           <a:latin typeface="Arial"/>
                         </a:rPr>
-                        <a:t>extracted into one shared function, then verified on 1 470 rows</a:t>
+                        <a:t>extraites dans une fonction unique, puis vérifiées sur 1 470 lignes</a:t>
                       </a:r>
                     </a:p>
                   </a:txBody>
@@ -9105,7 +9114,7 @@
                           </a:solidFill>
                           <a:latin typeface="Arial"/>
                         </a:rPr>
-                        <a:t>Tests must not need a PostgreSQL server</a:t>
+                        <a:t>Les tests ne doivent pas exiger un serveur PostgreSQL</a:t>
                       </a:r>
                     </a:p>
                   </a:txBody>
@@ -9127,7 +9136,7 @@
                           </a:solidFill>
                           <a:latin typeface="Arial"/>
                         </a:rPr>
-                        <a:t>in-memory SQLite + FastAPI dependency override</a:t>
+                        <a:t>SQLite en mémoire + substitution de dépendance FastAPI</a:t>
                       </a:r>
                     </a:p>
                   </a:txBody>
@@ -9151,7 +9160,7 @@
                           </a:solidFill>
                           <a:latin typeface="Arial"/>
                         </a:rPr>
-                        <a:t>The deploy job silently never ran</a:t>
+                        <a:t>L'étape de déploiement ne s'exécutait jamais</a:t>
                       </a:r>
                     </a:p>
                   </a:txBody>
@@ -9173,7 +9182,7 @@
                           </a:solidFill>
                           <a:latin typeface="Arial"/>
                         </a:rPr>
-                        <a:t>a YAML indentation error placed it inside another job</a:t>
+                        <a:t>une erreur d'indentation YAML la plaçait dans un autre job</a:t>
                       </a:r>
                     </a:p>
                   </a:txBody>
@@ -9197,7 +9206,7 @@
                           </a:solidFill>
                           <a:latin typeface="Arial"/>
                         </a:rPr>
-                        <a:t>A CLI release broke the deployment</a:t>
+                        <a:t>Une publication de CLI a cassé le déploiement</a:t>
                       </a:r>
                     </a:p>
                   </a:txBody>
@@ -9219,7 +9228,7 @@
                           </a:solidFill>
                           <a:latin typeface="Arial"/>
                         </a:rPr>
-                        <a:t>action updated and the tool version pinned</a:t>
+                        <a:t>action mise à jour et version de l'outil figée</a:t>
                       </a:r>
                     </a:p>
                   </a:txBody>
@@ -9243,7 +9252,7 @@
                           </a:solidFill>
                           <a:latin typeface="Arial"/>
                         </a:rPr>
-                        <a:t>Local and remote branches had diverged</a:t>
+                        <a:t>Branches locale et distante divergentes</a:t>
                       </a:r>
                     </a:p>
                   </a:txBody>
@@ -9265,7 +9274,7 @@
                           </a:solidFill>
                           <a:latin typeface="Arial"/>
                         </a:rPr>
-                        <a:t>merged instead of force-pushing, so no commit was lost</a:t>
+                        <a:t>fusion plutôt que push forcé : aucun commit perdu</a:t>
                       </a:r>
                     </a:p>
                   </a:txBody>
@@ -9327,7 +9336,7 @@
                 </a:solidFill>
                 <a:latin typeface="Arial"/>
               </a:rPr>
-              <a:t>Results and next steps</a:t>
+              <a:t>Bilan et prochaines étapes</a:t>
             </a:r>
           </a:p>
         </p:txBody>
@@ -9405,7 +9414,7 @@
                 </a:solidFill>
                 <a:latin typeface="Arial"/>
               </a:rPr>
-              <a:t>Futurisys — Deploying an ML model in production</a:t>
+              <a:t>Futurisys — mise en production d'un modèle de ML</a:t>
             </a:r>
           </a:p>
         </p:txBody>
@@ -9493,7 +9502,7 @@
                 </a:solidFill>
                 <a:latin typeface="Arial"/>
               </a:rPr>
-              <a:t>Delivered</a:t>
+              <a:t>Livré</a:t>
             </a:r>
           </a:p>
         </p:txBody>
@@ -9532,7 +9541,7 @@
                 </a:solidFill>
                 <a:latin typeface="Arial"/>
               </a:rPr>
-              <a:t>•  API exposing the model, documented</a:t>
+              <a:t>•  API exposant le modèle, documentée</a:t>
             </a:r>
           </a:p>
           <a:p>
@@ -9548,7 +9557,7 @@
                 </a:solidFill>
                 <a:latin typeface="Arial"/>
               </a:rPr>
-              <a:t>•  PostgreSQL database + UML schema</a:t>
+              <a:t>•  Base PostgreSQL + schéma UML</a:t>
             </a:r>
           </a:p>
           <a:p>
@@ -9564,7 +9573,7 @@
                 </a:solidFill>
                 <a:latin typeface="Arial"/>
               </a:rPr>
-              <a:t>•  Dataset loaded: 1 470 employees</a:t>
+              <a:t>•  Dataset chargé : 1 470 employés</a:t>
             </a:r>
           </a:p>
           <a:p>
@@ -9580,7 +9589,7 @@
                 </a:solidFill>
                 <a:latin typeface="Arial"/>
               </a:rPr>
-              <a:t>•  Every call traced, errors included</a:t>
+              <a:t>•  Chaque appel tracé, erreurs comprises</a:t>
             </a:r>
           </a:p>
           <a:p>
@@ -9596,7 +9605,7 @@
                 </a:solidFill>
                 <a:latin typeface="Arial"/>
               </a:rPr>
-              <a:t>•  65 tests, 86% coverage, green CI</a:t>
+              <a:t>•  65 tests, 86 % de couverture, CI verte</a:t>
             </a:r>
           </a:p>
           <a:p>
@@ -9612,7 +9621,7 @@
                 </a:solidFill>
                 <a:latin typeface="Arial"/>
               </a:rPr>
-              <a:t>•  Deployed via Docker + GitHub Actions</a:t>
+              <a:t>•  Déployé via Docker + GitHub Actions</a:t>
             </a:r>
           </a:p>
         </p:txBody>
@@ -9665,7 +9674,7 @@
                 </a:solidFill>
                 <a:latin typeface="Arial"/>
               </a:rPr>
-              <a:t>Next steps</a:t>
+              <a:t>Prochaines étapes</a:t>
             </a:r>
           </a:p>
         </p:txBody>
@@ -9704,7 +9713,7 @@
                 </a:solidFill>
                 <a:latin typeface="Arial"/>
               </a:rPr>
-              <a:t>•  /predict/{id} reading an employee from the database</a:t>
+              <a:t>•  /predict/{id} lisant un employé directement en base</a:t>
             </a:r>
           </a:p>
           <a:p>
@@ -9720,7 +9729,7 @@
                 </a:solidFill>
                 <a:latin typeface="Arial"/>
               </a:rPr>
-              <a:t>•  Authentication (API key) before any real exposure</a:t>
+              <a:t>•  Authentification (clé d'API) avant toute ouverture réelle</a:t>
             </a:r>
           </a:p>
           <a:p>
@@ -9736,7 +9745,7 @@
                 </a:solidFill>
                 <a:latin typeface="Arial"/>
               </a:rPr>
-              <a:t>•  Drift monitoring: compare prediction_input with the training data</a:t>
+              <a:t>•  Monitoring de dérive : comparer prediction_input aux données d'entraînement</a:t>
             </a:r>
           </a:p>
           <a:p>
@@ -9752,7 +9761,7 @@
                 </a:solidFill>
                 <a:latin typeface="Arial"/>
               </a:rPr>
-              <a:t>•  Close the loop: record actual departures to measure live accuracy</a:t>
+              <a:t>•  Boucler : enregistrer les départs réels pour mesurer la performance en production</a:t>
             </a:r>
           </a:p>
         </p:txBody>
@@ -9804,7 +9813,7 @@
                 </a:solidFill>
                 <a:latin typeface="Arial"/>
               </a:rPr>
-              <a:t>Links and demonstration</a:t>
+              <a:t>Liens et démonstration</a:t>
             </a:r>
           </a:p>
         </p:txBody>
@@ -9882,7 +9891,7 @@
                 </a:solidFill>
                 <a:latin typeface="Arial"/>
               </a:rPr>
-              <a:t>Futurisys — Deploying an ML model in production</a:t>
+              <a:t>Futurisys — mise en production d'un modèle de ML</a:t>
             </a:r>
           </a:p>
         </p:txBody>
@@ -9957,7 +9966,7 @@
                           </a:solidFill>
                           <a:latin typeface="Arial"/>
                         </a:rPr>
-                        <a:t>What</a:t>
+                        <a:t>Quoi</a:t>
                       </a:r>
                     </a:p>
                   </a:txBody>
@@ -9979,7 +9988,7 @@
                           </a:solidFill>
                           <a:latin typeface="Arial"/>
                         </a:rPr>
-                        <a:t>Where</a:t>
+                        <a:t>Où</a:t>
                       </a:r>
                     </a:p>
                   </a:txBody>
@@ -10003,7 +10012,7 @@
                           </a:solidFill>
                           <a:latin typeface="Arial"/>
                         </a:rPr>
-                        <a:t>Source code</a:t>
+                        <a:t>Code source</a:t>
                       </a:r>
                     </a:p>
                   </a:txBody>
@@ -10049,7 +10058,7 @@
                           </a:solidFill>
                           <a:latin typeface="Arial"/>
                         </a:rPr>
-                        <a:t>Deployed API</a:t>
+                        <a:t>API déployée</a:t>
                       </a:r>
                     </a:p>
                   </a:txBody>
@@ -10095,7 +10104,7 @@
                           </a:solidFill>
                           <a:latin typeface="Arial"/>
                         </a:rPr>
-                        <a:t>Interactive documentation</a:t>
+                        <a:t>Documentation interactive</a:t>
                       </a:r>
                     </a:p>
                   </a:txBody>
@@ -10117,7 +10126,7 @@
                           </a:solidFill>
                           <a:latin typeface="Arial"/>
                         </a:rPr>
-                        <a:t>/docs on the running API</a:t>
+                        <a:t>/docs sur l'API en fonctionnement</a:t>
                       </a:r>
                     </a:p>
                   </a:txBody>
@@ -10141,7 +10150,7 @@
                           </a:solidFill>
                           <a:latin typeface="Arial"/>
                         </a:rPr>
-                        <a:t>Database schema (UML) and choices</a:t>
+                        <a:t>Schéma de la base (UML) et choix techniques</a:t>
                       </a:r>
                     </a:p>
                   </a:txBody>
@@ -10187,7 +10196,7 @@
                           </a:solidFill>
                           <a:latin typeface="Arial"/>
                         </a:rPr>
-                        <a:t>Install, usage, security</a:t>
+                        <a:t>Installation, usage, sécurité</a:t>
                       </a:r>
                     </a:p>
                   </a:txBody>
@@ -10253,7 +10262,7 @@
                 </a:solidFill>
                 <a:latin typeface="Arial"/>
               </a:rPr>
-              <a:t>Live demonstration</a:t>
+              <a:t>Démonstration en direct</a:t>
             </a:r>
           </a:p>
           <a:p>
@@ -10264,7 +10273,7 @@
                 </a:solidFill>
                 <a:latin typeface="Arial"/>
               </a:rPr>
-              <a:t>1. start the API locally   2. send a prediction from /docs   3. show the recorded row in PostgreSQL</a:t>
+              <a:t>1. lancer l'API en local   2. envoyer une prédiction depuis /docs   3. montrer la ligne enregistrée dans PostgreSQL</a:t>
             </a:r>
           </a:p>
         </p:txBody>
@@ -10299,7 +10308,7 @@
                 </a:solidFill>
                 <a:latin typeface="Arial"/>
               </a:rPr>
-              <a:t>Thank you — questions welcome</a:t>
+              <a:t>Merci — place aux questions</a:t>
             </a:r>
           </a:p>
         </p:txBody>
@@ -10351,7 +10360,7 @@
                 </a:solidFill>
                 <a:latin typeface="Arial"/>
               </a:rPr>
-              <a:t>Context and mission</a:t>
+              <a:t>Contexte et mission</a:t>
             </a:r>
           </a:p>
         </p:txBody>
@@ -10429,7 +10438,7 @@
                 </a:solidFill>
                 <a:latin typeface="Arial"/>
               </a:rPr>
-              <a:t>Where this project starts and what it had to achieve</a:t>
+              <a:t>D'où part le projet et ce qu'il devait accomplir</a:t>
             </a:r>
           </a:p>
         </p:txBody>
@@ -10463,7 +10472,7 @@
                 </a:solidFill>
                 <a:latin typeface="Arial"/>
               </a:rPr>
-              <a:t>Futurisys — Deploying an ML model in production</a:t>
+              <a:t>Futurisys — mise en production d'un modèle de ML</a:t>
             </a:r>
           </a:p>
         </p:txBody>
@@ -10546,7 +10555,7 @@
                 </a:solidFill>
                 <a:latin typeface="Arial"/>
               </a:rPr>
-              <a:t>Business need:</a:t>
+              <a:t>Besoin métier :</a:t>
             </a:r>
             <a:r>
               <a:rPr sz="1700" b="0" i="0">
@@ -10555,7 +10564,7 @@
                 </a:solidFill>
                 <a:latin typeface="Arial"/>
               </a:rPr>
-              <a:t> Futurisys HR wants to anticipate employee departures instead of reacting to them</a:t>
+              <a:t> les RH de Futurisys veulent anticiper les départs plutôt que les subir</a:t>
             </a:r>
           </a:p>
           <a:p>
@@ -10580,7 +10589,7 @@
                 </a:solidFill>
                 <a:latin typeface="Arial"/>
               </a:rPr>
-              <a:t>Starting point:</a:t>
+              <a:t>Point de départ :</a:t>
             </a:r>
             <a:r>
               <a:rPr sz="1700" b="0" i="0">
@@ -10589,7 +10598,7 @@
                 </a:solidFill>
                 <a:latin typeface="Arial"/>
               </a:rPr>
-              <a:t> a model trained in a previous project, saved as a .joblib file</a:t>
+              <a:t> un modèle entraîné lors du projet précédent, sauvegardé dans un fichier .joblib</a:t>
             </a:r>
           </a:p>
           <a:p>
@@ -10605,7 +10614,7 @@
                 </a:solidFill>
                 <a:latin typeface="Arial"/>
               </a:rPr>
-              <a:t>     –  calibrated LinearSVC, class_weight balanced, custom decision threshold</a:t>
+              <a:t>     –  LinearSVC calibré, class_weight balanced, seuil de décision personnalisé</a:t>
             </a:r>
           </a:p>
           <a:p>
@@ -10630,7 +10639,7 @@
                 </a:solidFill>
                 <a:latin typeface="Arial"/>
               </a:rPr>
-              <a:t>This project:</a:t>
+              <a:t>Ce projet :</a:t>
             </a:r>
             <a:r>
               <a:rPr sz="1700" b="0" i="0">
@@ -10639,7 +10648,7 @@
                 </a:solidFill>
                 <a:latin typeface="Arial"/>
               </a:rPr>
-              <a:t> turn that file into a service the company can actually use</a:t>
+              <a:t> transformer ce fichier en un service réellement utilisable par l'entreprise</a:t>
             </a:r>
           </a:p>
           <a:p>
@@ -10664,7 +10673,7 @@
                 </a:solidFill>
                 <a:latin typeface="Arial"/>
               </a:rPr>
-              <a:t>Key constraint from the brief:</a:t>
+              <a:t>Contrainte du cahier des charges :</a:t>
             </a:r>
             <a:r>
               <a:rPr sz="1700" b="0" i="0">
@@ -10673,7 +10682,7 @@
                 </a:solidFill>
                 <a:latin typeface="Arial"/>
               </a:rPr>
-              <a:t> every interaction with the model must go through a database</a:t>
+              <a:t> toute interaction avec le modèle doit passer par une base de données</a:t>
             </a:r>
           </a:p>
           <a:p>
@@ -10689,7 +10698,7 @@
                 </a:solidFill>
                 <a:latin typeface="Arial"/>
               </a:rPr>
-              <a:t>     –  inputs sent to the model and outputs produced are stored in dedicated tables</a:t>
+              <a:t>     –  les entrées envoyées au modèle et les sorties produites sont stockées dans des tables dédiées</a:t>
             </a:r>
           </a:p>
         </p:txBody>
@@ -10741,7 +10750,7 @@
                 </a:solidFill>
                 <a:latin typeface="Arial"/>
               </a:rPr>
-              <a:t>What was delivered</a:t>
+              <a:t>Ce qui a été livré</a:t>
             </a:r>
           </a:p>
         </p:txBody>
@@ -10819,7 +10828,7 @@
                 </a:solidFill>
                 <a:latin typeface="Arial"/>
               </a:rPr>
-              <a:t>Futurisys — Deploying an ML model in production</a:t>
+              <a:t>Futurisys — mise en production d'un modèle de ML</a:t>
             </a:r>
           </a:p>
         </p:txBody>
@@ -10895,7 +10904,7 @@
                           </a:solidFill>
                           <a:latin typeface="Arial"/>
                         </a:rPr>
-                        <a:t>Deliverable</a:t>
+                        <a:t>Livrable</a:t>
                       </a:r>
                     </a:p>
                   </a:txBody>
@@ -10917,7 +10926,7 @@
                           </a:solidFill>
                           <a:latin typeface="Arial"/>
                         </a:rPr>
-                        <a:t>Technology</a:t>
+                        <a:t>Technologie</a:t>
                       </a:r>
                     </a:p>
                   </a:txBody>
@@ -10939,7 +10948,7 @@
                           </a:solidFill>
                           <a:latin typeface="Arial"/>
                         </a:rPr>
-                        <a:t>State</a:t>
+                        <a:t>État</a:t>
                       </a:r>
                     </a:p>
                   </a:txBody>
@@ -10963,7 +10972,7 @@
                           </a:solidFill>
                           <a:latin typeface="Arial"/>
                         </a:rPr>
-                        <a:t>REST API exposing the model</a:t>
+                        <a:t>API REST exposant le modèle</a:t>
                       </a:r>
                     </a:p>
                   </a:txBody>
@@ -11007,7 +11016,7 @@
                           </a:solidFill>
                           <a:latin typeface="Arial"/>
                         </a:rPr>
-                        <a:t>3 routes, documented at /docs</a:t>
+                        <a:t>3 routes, documentées sur /docs</a:t>
                       </a:r>
                     </a:p>
                   </a:txBody>
@@ -11031,7 +11040,7 @@
                           </a:solidFill>
                           <a:latin typeface="Arial"/>
                         </a:rPr>
-                        <a:t>Relational database + UML schema</a:t>
+                        <a:t>Base relationnelle + schéma UML</a:t>
                       </a:r>
                     </a:p>
                   </a:txBody>
@@ -11075,7 +11084,7 @@
                           </a:solidFill>
                           <a:latin typeface="Arial"/>
                         </a:rPr>
-                        <a:t>6 tables, dataset loaded</a:t>
+                        <a:t>6 tables, dataset chargé</a:t>
                       </a:r>
                     </a:p>
                   </a:txBody>
@@ -11099,7 +11108,7 @@
                           </a:solidFill>
                           <a:latin typeface="Arial"/>
                         </a:rPr>
-                        <a:t>Full traceability of exchanges</a:t>
+                        <a:t>Traçabilité complète des échanges</a:t>
                       </a:r>
                     </a:p>
                   </a:txBody>
@@ -11121,7 +11130,7 @@
                           </a:solidFill>
                           <a:latin typeface="Arial"/>
                         </a:rPr>
-                        <a:t>dedicated input/output tables</a:t>
+                        <a:t>tables input / output dédiées</a:t>
                       </a:r>
                     </a:p>
                   </a:txBody>
@@ -11143,7 +11152,7 @@
                           </a:solidFill>
                           <a:latin typeface="Arial"/>
                         </a:rPr>
-                        <a:t>every call recorded</a:t>
+                        <a:t>chaque appel enregistré</a:t>
                       </a:r>
                     </a:p>
                   </a:txBody>
@@ -11167,7 +11176,7 @@
                           </a:solidFill>
                           <a:latin typeface="Arial"/>
                         </a:rPr>
-                        <a:t>Automated tests</a:t>
+                        <a:t>Tests automatisés</a:t>
                       </a:r>
                     </a:p>
                   </a:txBody>
@@ -11189,7 +11198,7 @@
                           </a:solidFill>
                           <a:latin typeface="Arial"/>
                         </a:rPr>
-                        <a:t>Pytest (+ coverage)</a:t>
+                        <a:t>Pytest (+ couverture)</a:t>
                       </a:r>
                     </a:p>
                   </a:txBody>
@@ -11211,7 +11220,7 @@
                           </a:solidFill>
                           <a:latin typeface="Arial"/>
                         </a:rPr>
-                        <a:t>65 tests, 86% coverage</a:t>
+                        <a:t>65 tests, 86 % de couverture</a:t>
                       </a:r>
                     </a:p>
                   </a:txBody>
@@ -11235,7 +11244,7 @@
                           </a:solidFill>
                           <a:latin typeface="Arial"/>
                         </a:rPr>
-                        <a:t>Continuous integration / delivery</a:t>
+                        <a:t>Intégration et déploiement continus</a:t>
                       </a:r>
                     </a:p>
                   </a:txBody>
@@ -11303,7 +11312,7 @@
                           </a:solidFill>
                           <a:latin typeface="Arial"/>
                         </a:rPr>
-                        <a:t>Containerised deployment</a:t>
+                        <a:t>Déploiement conteneurisé</a:t>
                       </a:r>
                     </a:p>
                   </a:txBody>
@@ -11325,7 +11334,7 @@
                           </a:solidFill>
                           <a:latin typeface="Arial"/>
                         </a:rPr>
-                        <a:t>Docker + Hugging Face Space</a:t>
+                        <a:t>Docker + Space Hugging Face</a:t>
                       </a:r>
                     </a:p>
                   </a:txBody>
@@ -11347,7 +11356,7 @@
                           </a:solidFill>
                           <a:latin typeface="Arial"/>
                         </a:rPr>
-                        <a:t>Space running</a:t>
+                        <a:t>Space en ligne</a:t>
                       </a:r>
                     </a:p>
                   </a:txBody>
@@ -11415,7 +11424,7 @@
                           </a:solidFill>
                           <a:latin typeface="Arial"/>
                         </a:rPr>
-                        <a:t>install, usage, schema, choices</a:t>
+                        <a:t>installation, usage, schéma, choix</a:t>
                       </a:r>
                     </a:p>
                   </a:txBody>
@@ -11459,7 +11468,7 @@
                 </a:solidFill>
                 <a:latin typeface="Arial"/>
               </a:rPr>
-              <a:t>1 679 lines of Python  ·  4 packages (app / modele / db / tests)  ·  65 automated tests</a:t>
+              <a:t>1 679 lignes de Python  ·  4 packages (app / modele / db / tests)  ·  65 tests automatisés</a:t>
             </a:r>
           </a:p>
         </p:txBody>
@@ -11589,7 +11598,7 @@
                 </a:solidFill>
                 <a:latin typeface="Arial"/>
               </a:rPr>
-              <a:t>Three packages, one rule: no prediction without a record</a:t>
+              <a:t>Trois packages, une règle : pas de prédiction sans trace</a:t>
             </a:r>
           </a:p>
         </p:txBody>
@@ -11623,7 +11632,7 @@
                 </a:solidFill>
                 <a:latin typeface="Arial"/>
               </a:rPr>
-              <a:t>Futurisys — Deploying an ML model in production</a:t>
+              <a:t>Futurisys — mise en production d'un modèle de ML</a:t>
             </a:r>
           </a:p>
         </p:txBody>
@@ -11935,7 +11944,7 @@
               </a:rPr>
               <a:t>
 features + pipeline
-threshold 0.2941</a:t>
+seuil 0,2941</a:t>
             </a:r>
           </a:p>
         </p:txBody>
@@ -12207,7 +12216,7 @@
               </a:rPr>
               <a:t>
 employee · evaluation · sondage
-1 470 employees</a:t>
+1 470 employés</a:t>
             </a:r>
           </a:p>
         </p:txBody>
@@ -12262,7 +12271,7 @@
                 </a:solidFill>
                 <a:latin typeface="Arial"/>
               </a:rPr>
-              <a:t>Traceability</a:t>
+              <a:t>Traçabilité</a:t>
             </a:r>
             <a:r>
               <a:rPr sz="1200" b="0" i="0">
@@ -12273,7 +12282,7 @@
               </a:rPr>
               <a:t>
 prediction_input · prediction_output
-1 row per call</a:t>
+1 ligne par appel</a:t>
             </a:r>
           </a:p>
         </p:txBody>
@@ -12328,7 +12337,7 @@
                 </a:solidFill>
                 <a:latin typeface="Arial"/>
               </a:rPr>
-              <a:t>Model registry</a:t>
+              <a:t>Registre du modèle</a:t>
             </a:r>
             <a:r>
               <a:rPr sz="1200" b="0" i="0">
@@ -12339,7 +12348,7 @@
               </a:rPr>
               <a:t>
 model_version
-file + threshold</a:t>
+fichier + seuil</a:t>
             </a:r>
           </a:p>
         </p:txBody>
@@ -12373,7 +12382,7 @@
                 </a:solidFill>
                 <a:latin typeface="Arial"/>
               </a:rPr>
-              <a:t>Each package has one job: </a:t>
+              <a:t>Chaque package a un seul rôle : </a:t>
             </a:r>
             <a:r>
               <a:rPr sz="1300" b="1" i="0">
@@ -12391,7 +12400,7 @@
                 </a:solidFill>
                 <a:latin typeface="Arial"/>
               </a:rPr>
-              <a:t> speaks HTTP, </a:t>
+              <a:t> parle HTTP, </a:t>
             </a:r>
             <a:r>
               <a:rPr sz="1300" b="1" i="0">
@@ -12409,7 +12418,7 @@
                 </a:solidFill>
                 <a:latin typeface="Arial"/>
               </a:rPr>
-              <a:t> predicts, </a:t>
+              <a:t> prédit, </a:t>
             </a:r>
             <a:r>
               <a:rPr sz="1300" b="1" i="0">
@@ -12427,7 +12436,7 @@
                 </a:solidFill>
                 <a:latin typeface="Arial"/>
               </a:rPr>
-              <a:t> remembers. None knows the others' internals.</a:t>
+              <a:t> mémorise. Aucun ne connaît l'intérieur des autres.</a:t>
             </a:r>
           </a:p>
         </p:txBody>
@@ -12479,7 +12488,7 @@
                 </a:solidFill>
                 <a:latin typeface="Arial"/>
               </a:rPr>
-              <a:t>The model it serves</a:t>
+              <a:t>Le modèle servi</a:t>
             </a:r>
           </a:p>
         </p:txBody>
@@ -12557,7 +12566,7 @@
                 </a:solidFill>
                 <a:latin typeface="Arial"/>
               </a:rPr>
-              <a:t>Trained previously — this project consumes it, never retrains it</a:t>
+              <a:t>Entraîné en amont — ce projet le consomme, il ne le ré-entraîne jamais</a:t>
             </a:r>
           </a:p>
         </p:txBody>
@@ -12591,7 +12600,7 @@
                 </a:solidFill>
                 <a:latin typeface="Arial"/>
               </a:rPr>
-              <a:t>Futurisys — Deploying an ML model in production</a:t>
+              <a:t>Futurisys — mise en production d'un modèle de ML</a:t>
             </a:r>
           </a:p>
         </p:txBody>
@@ -12665,7 +12674,7 @@
                 </a:solidFill>
                 <a:latin typeface="Arial"/>
               </a:rPr>
-              <a:t>•  Loaded once at startup from </a:t>
+              <a:t>•  Chargé une seule fois au démarrage depuis </a:t>
             </a:r>
             <a:r>
               <a:rPr sz="1600" b="1" i="0">
@@ -12690,7 +12699,7 @@
                 </a:solidFill>
                 <a:latin typeface="Arial"/>
               </a:rPr>
-              <a:t>•  The file carries the </a:t>
+              <a:t>•  Le fichier contient le </a:t>
             </a:r>
             <a:r>
               <a:rPr sz="1600" b="1" i="0">
@@ -12708,7 +12717,7 @@
                 </a:solidFill>
                 <a:latin typeface="Arial"/>
               </a:rPr>
-              <a:t>, the </a:t>
+              <a:t>, le </a:t>
             </a:r>
             <a:r>
               <a:rPr sz="1600" b="1" i="0">
@@ -12717,7 +12726,7 @@
                 </a:solidFill>
                 <a:latin typeface="Arial"/>
               </a:rPr>
-              <a:t>threshold</a:t>
+              <a:t>seuil</a:t>
             </a:r>
             <a:r>
               <a:rPr sz="1600" b="0" i="0">
@@ -12726,7 +12735,7 @@
                 </a:solidFill>
                 <a:latin typeface="Arial"/>
               </a:rPr>
-              <a:t>, the </a:t>
+              <a:t>, les </a:t>
             </a:r>
             <a:r>
               <a:rPr sz="1600" b="1" i="0">
@@ -12735,7 +12744,7 @@
                 </a:solidFill>
                 <a:latin typeface="Arial"/>
               </a:rPr>
-              <a:t>37 expected columns</a:t>
+              <a:t>37 colonnes attendues</a:t>
             </a:r>
             <a:r>
               <a:rPr sz="1600" b="0" i="0">
@@ -12744,7 +12753,7 @@
                 </a:solidFill>
                 <a:latin typeface="Arial"/>
               </a:rPr>
-              <a:t> and the </a:t>
+              <a:t> et les </a:t>
             </a:r>
             <a:r>
               <a:rPr sz="1600" b="1" i="0">
@@ -12753,7 +12762,7 @@
                 </a:solidFill>
                 <a:latin typeface="Arial"/>
               </a:rPr>
-              <a:t>library versions</a:t>
+              <a:t>versions des librairies</a:t>
             </a:r>
           </a:p>
           <a:p>
@@ -12769,7 +12778,7 @@
                 </a:solidFill>
                 <a:latin typeface="Arial"/>
               </a:rPr>
-              <a:t>•  Decision threshold </a:t>
+              <a:t>•  Seuil de décision </a:t>
             </a:r>
             <a:r>
               <a:rPr sz="1600" b="1" i="0">
@@ -12778,7 +12787,7 @@
                 </a:solidFill>
                 <a:latin typeface="Arial"/>
               </a:rPr>
-              <a:t>0.2941</a:t>
+              <a:t>0,2941</a:t>
             </a:r>
             <a:r>
               <a:rPr sz="1600" b="0" i="0">
@@ -12787,7 +12796,7 @@
                 </a:solidFill>
                 <a:latin typeface="Arial"/>
               </a:rPr>
-              <a:t>, not 0.5 — chosen to catch more real departures</a:t>
+              <a:t> et non 0,5 — choisi pour détecter davantage de départs réels</a:t>
             </a:r>
           </a:p>
         </p:txBody>
@@ -12830,7 +12839,7 @@
                           </a:solidFill>
                           <a:latin typeface="Arial"/>
                         </a:rPr>
-                        <a:t>Precision</a:t>
+                        <a:t>Précision</a:t>
                       </a:r>
                     </a:p>
                   </a:txBody>
@@ -12852,7 +12861,7 @@
                           </a:solidFill>
                           <a:latin typeface="Arial"/>
                         </a:rPr>
-                        <a:t>Recall</a:t>
+                        <a:t>Rappel</a:t>
                       </a:r>
                     </a:p>
                   </a:txBody>
@@ -12942,7 +12951,7 @@
                           </a:solidFill>
                           <a:latin typeface="Arial"/>
                         </a:rPr>
-                        <a:t>0.54</a:t>
+                        <a:t>0,54</a:t>
                       </a:r>
                     </a:p>
                   </a:txBody>
@@ -12964,7 +12973,7 @@
                           </a:solidFill>
                           <a:latin typeface="Arial"/>
                         </a:rPr>
-                        <a:t>0.57</a:t>
+                        <a:t>0,57</a:t>
                       </a:r>
                     </a:p>
                   </a:txBody>
@@ -12986,7 +12995,7 @@
                           </a:solidFill>
                           <a:latin typeface="Arial"/>
                         </a:rPr>
-                        <a:t>0.56</a:t>
+                        <a:t>0,56</a:t>
                       </a:r>
                     </a:p>
                   </a:txBody>
@@ -13008,7 +13017,7 @@
                           </a:solidFill>
                           <a:latin typeface="Arial"/>
                         </a:rPr>
-                        <a:t>0.837</a:t>
+                        <a:t>0,837</a:t>
                       </a:r>
                     </a:p>
                   </a:txBody>
@@ -13030,7 +13039,7 @@
                           </a:solidFill>
                           <a:latin typeface="Arial"/>
                         </a:rPr>
-                        <a:t>0.568</a:t>
+                        <a:t>0,568</a:t>
                       </a:r>
                     </a:p>
                   </a:txBody>
@@ -13074,7 +13083,7 @@
                 </a:solidFill>
                 <a:latin typeface="Arial"/>
               </a:rPr>
-              <a:t>Why recall matters here: missing an employee who leaves costs far more than a false alarm. The threshold encodes that business trade-off, so the API must apply it — never the default 0.5.</a:t>
+              <a:t>Pourquoi le rappel compte ici : rater un employé qui part coûte bien plus cher qu'une fausse alerte. Le seuil traduit ce compromis métier, donc l'API doit l'appliquer — jamais le 0,5 par défaut.</a:t>
             </a:r>
           </a:p>
         </p:txBody>
@@ -13126,7 +13135,7 @@
                 </a:solidFill>
                 <a:latin typeface="Arial"/>
               </a:rPr>
-              <a:t>The trap I had to avoid: training/serving skew</a:t>
+              <a:t>Le piège à éviter : le décalage entraînement / production</a:t>
             </a:r>
           </a:p>
         </p:txBody>
@@ -13204,7 +13213,7 @@
                 </a:solidFill>
                 <a:latin typeface="Arial"/>
               </a:rPr>
-              <a:t>Futurisys — Deploying an ML model in production</a:t>
+              <a:t>Futurisys — mise en production d'un modèle de ML</a:t>
             </a:r>
           </a:p>
         </p:txBody>
@@ -13278,7 +13287,7 @@
                 </a:solidFill>
                 <a:latin typeface="Arial"/>
               </a:rPr>
-              <a:t>•  The model needs </a:t>
+              <a:t>•  Le modèle attend </a:t>
             </a:r>
             <a:r>
               <a:rPr sz="1600" b="1" i="0">
@@ -13287,7 +13296,7 @@
                 </a:solidFill>
                 <a:latin typeface="Arial"/>
               </a:rPr>
-              <a:t>37 columns</a:t>
+              <a:t>37 colonnes</a:t>
             </a:r>
             <a:r>
               <a:rPr sz="1600" b="0" i="0">
@@ -13296,7 +13305,7 @@
                 </a:solidFill>
                 <a:latin typeface="Arial"/>
               </a:rPr>
-              <a:t>: 27 raw fields + </a:t>
+              <a:t> : 27 champs bruts + </a:t>
             </a:r>
             <a:r>
               <a:rPr sz="1600" b="1" i="0">
@@ -13305,7 +13314,7 @@
                 </a:solidFill>
                 <a:latin typeface="Arial"/>
               </a:rPr>
-              <a:t>10 engineered</a:t>
+              <a:t>10 calculées</a:t>
             </a:r>
             <a:r>
               <a:rPr sz="1600" b="0" i="0">
@@ -13339,7 +13348,7 @@
                 </a:solidFill>
                 <a:latin typeface="Arial"/>
               </a:rPr>
-              <a:t>Risk:</a:t>
+              <a:t>Risque :</a:t>
             </a:r>
             <a:r>
               <a:rPr sz="1600" b="0" i="0">
@@ -13348,7 +13357,7 @@
                 </a:solidFill>
                 <a:latin typeface="Arial"/>
               </a:rPr>
-              <a:t> if the API computes them slightly differently from the training notebook, accuracy drops </a:t>
+              <a:t> si l'API les calcule différemment du notebook d'entraînement, la performance baisse </a:t>
             </a:r>
             <a:r>
               <a:rPr sz="1600" b="1" i="0">
@@ -13357,7 +13366,7 @@
                 </a:solidFill>
                 <a:latin typeface="Arial"/>
               </a:rPr>
-              <a:t>silently</a:t>
+              <a:t>silencieusement</a:t>
             </a:r>
           </a:p>
           <a:p>
@@ -13382,7 +13391,7 @@
                 </a:solidFill>
                 <a:latin typeface="Arial"/>
               </a:rPr>
-              <a:t>Solution:</a:t>
+              <a:t>Solution :</a:t>
             </a:r>
             <a:r>
               <a:rPr sz="1600" b="0" i="0">
@@ -13391,7 +13400,7 @@
                 </a:solidFill>
                 <a:latin typeface="Arial"/>
               </a:rPr>
-              <a:t> one shared function, </a:t>
+              <a:t> une seule fonction partagée, </a:t>
             </a:r>
             <a:r>
               <a:rPr sz="1600" b="1" i="0">
@@ -13409,7 +13418,7 @@
                 </a:solidFill>
                 <a:latin typeface="Arial"/>
               </a:rPr>
-              <a:t>, holding the notebook's exact formulas</a:t>
+              <a:t>, avec les formules exactes du notebook</a:t>
             </a:r>
           </a:p>
           <a:p>
@@ -13434,7 +13443,7 @@
                 </a:solidFill>
                 <a:latin typeface="Arial"/>
               </a:rPr>
-              <a:t>Verification:</a:t>
+              <a:t>Vérification :</a:t>
             </a:r>
             <a:r>
               <a:rPr sz="1600" b="0" i="0">
@@ -13443,7 +13452,7 @@
                 </a:solidFill>
                 <a:latin typeface="Arial"/>
               </a:rPr>
-              <a:t> same features and same probabilities as the notebook on all </a:t>
+              <a:t> features et probabilités identiques au notebook sur les </a:t>
             </a:r>
             <a:r>
               <a:rPr sz="1600" b="1" i="0">
@@ -13452,7 +13461,7 @@
                 </a:solidFill>
                 <a:latin typeface="Arial"/>
               </a:rPr>
-              <a:t>1 470 employees</a:t>
+              <a:t>1 470 employés</a:t>
             </a:r>
             <a:r>
               <a:rPr sz="1600" b="0" i="0">
@@ -13461,7 +13470,7 @@
                 </a:solidFill>
                 <a:latin typeface="Arial"/>
               </a:rPr>
-              <a:t> (max diff 0.0)</a:t>
+              <a:t> (écart max 0,0)</a:t>
             </a:r>
           </a:p>
           <a:p>
@@ -13477,7 +13486,7 @@
                 </a:solidFill>
                 <a:latin typeface="Arial"/>
               </a:rPr>
-              <a:t>•  The API </a:t>
+              <a:t>•  L'API </a:t>
             </a:r>
             <a:r>
               <a:rPr sz="1600" b="1" i="0">
@@ -13486,7 +13495,7 @@
                 </a:solidFill>
                 <a:latin typeface="Arial"/>
               </a:rPr>
-              <a:t>refuses</a:t>
+              <a:t>refuse</a:t>
             </a:r>
             <a:r>
               <a:rPr sz="1600" b="0" i="0">
@@ -13495,7 +13504,7 @@
                 </a:solidFill>
                 <a:latin typeface="Arial"/>
               </a:rPr>
-              <a:t> a computed feature sent by a client (HTTP 422) — it calculates them itself</a:t>
+              <a:t> une feature calculée envoyée par un client (HTTP 422) — c'est elle qui la calcule</a:t>
             </a:r>
           </a:p>
         </p:txBody>
@@ -13584,7 +13593,7 @@
                 </a:solidFill>
                 <a:latin typeface="Arial"/>
               </a:rPr>
-              <a:t>Same code path for training and serving = no divergence possible.</a:t>
+              <a:t>Un seul chemin de code pour l'entraînement et la production = aucune divergence possible.</a:t>
             </a:r>
           </a:p>
         </p:txBody>
@@ -13636,7 +13645,7 @@
                 </a:solidFill>
                 <a:latin typeface="Arial"/>
               </a:rPr>
-              <a:t>The API</a:t>
+              <a:t>L'API</a:t>
             </a:r>
           </a:p>
         </p:txBody>
@@ -13714,7 +13723,7 @@
                 </a:solidFill>
                 <a:latin typeface="Arial"/>
               </a:rPr>
-              <a:t>Futurisys — Deploying an ML model in production</a:t>
+              <a:t>Futurisys — mise en production d'un modèle de ML</a:t>
             </a:r>
           </a:p>
         </p:txBody>
@@ -13812,7 +13821,7 @@
                           </a:solidFill>
                           <a:latin typeface="Arial"/>
                         </a:rPr>
-                        <a:t>Method</a:t>
+                        <a:t>Méthode</a:t>
                       </a:r>
                     </a:p>
                   </a:txBody>
@@ -13834,7 +13843,7 @@
                           </a:solidFill>
                           <a:latin typeface="Arial"/>
                         </a:rPr>
-                        <a:t>Role</a:t>
+                        <a:t>Rôle</a:t>
                       </a:r>
                     </a:p>
                   </a:txBody>
@@ -13902,7 +13911,7 @@
                           </a:solidFill>
                           <a:latin typeface="Arial"/>
                         </a:rPr>
-                        <a:t>welcome message</a:t>
+                        <a:t>message d'accueil</a:t>
                       </a:r>
                     </a:p>
                   </a:txBody>
@@ -13970,7 +13979,7 @@
                           </a:solidFill>
                           <a:latin typeface="Arial"/>
                         </a:rPr>
-                        <a:t>liveness check — works without a database</a:t>
+                        <a:t>vérification de vie — fonctionne sans base de données</a:t>
                       </a:r>
                     </a:p>
                   </a:txBody>
@@ -14038,7 +14047,7 @@
                           </a:solidFill>
                           <a:latin typeface="Arial"/>
                         </a:rPr>
-                        <a:t>interactive documentation, generated automatically</a:t>
+                        <a:t>documentation interactive, générée automatiquement</a:t>
                       </a:r>
                     </a:p>
                   </a:txBody>
@@ -14106,7 +14115,7 @@
                           </a:solidFill>
                           <a:latin typeface="Arial"/>
                         </a:rPr>
-                        <a:t>prediction for one employee, recorded in the database</a:t>
+                        <a:t>prédiction pour un employé, enregistrée en base</a:t>
                       </a:r>
                     </a:p>
                   </a:txBody>
@@ -14216,7 +14225,7 @@
                 </a:solidFill>
                 <a:latin typeface="Arial"/>
               </a:rPr>
-              <a:t>•  Input: the </a:t>
+              <a:t>•  Entrée : les </a:t>
             </a:r>
             <a:r>
               <a:rPr sz="1500" b="1" i="0">
@@ -14225,7 +14234,7 @@
                 </a:solidFill>
                 <a:latin typeface="Arial"/>
               </a:rPr>
-              <a:t>27 raw fields</a:t>
+              <a:t>27 champs bruts</a:t>
             </a:r>
             <a:r>
               <a:rPr sz="1500" b="0" i="0">
@@ -14234,7 +14243,7 @@
                 </a:solidFill>
                 <a:latin typeface="Arial"/>
               </a:rPr>
-              <a:t> only</a:t>
+              <a:t> uniquement</a:t>
             </a:r>
           </a:p>
           <a:p>
@@ -14268,7 +14277,7 @@
                 </a:solidFill>
                 <a:latin typeface="Arial"/>
               </a:rPr>
-              <a:t> = the database row id</a:t>
+              <a:t> = l'identifiant de la ligne en base</a:t>
             </a:r>
           </a:p>
           <a:p>
@@ -14284,7 +14293,7 @@
                 </a:solidFill>
                 <a:latin typeface="Arial"/>
               </a:rPr>
-              <a:t>     –  the client can trace its own request</a:t>
+              <a:t>     –  le client peut retracer sa propre requête</a:t>
             </a:r>
           </a:p>
           <a:p>
@@ -14300,7 +14309,7 @@
                 </a:solidFill>
                 <a:latin typeface="Arial"/>
               </a:rPr>
-              <a:t>•  Response validated by Pydantic too</a:t>
+              <a:t>•  La réponse est validée par Pydantic aussi</a:t>
             </a:r>
           </a:p>
         </p:txBody>
@@ -14352,7 +14361,7 @@
                 </a:solidFill>
                 <a:latin typeface="Arial"/>
               </a:rPr>
-              <a:t>Two validation gates</a:t>
+              <a:t>Deux barrières de validation</a:t>
             </a:r>
           </a:p>
         </p:txBody>
@@ -14430,7 +14439,7 @@
                 </a:solidFill>
                 <a:latin typeface="Arial"/>
               </a:rPr>
-              <a:t>The same rule stated twice, on purpose</a:t>
+              <a:t>La même règle énoncée deux fois, volontairement</a:t>
             </a:r>
           </a:p>
         </p:txBody>
@@ -14464,7 +14473,7 @@
                 </a:solidFill>
                 <a:latin typeface="Arial"/>
               </a:rPr>
-              <a:t>Futurisys — Deploying an ML model in production</a:t>
+              <a:t>Futurisys — mise en production d'un modèle de ML</a:t>
             </a:r>
           </a:p>
         </p:txBody>
@@ -14554,7 +14563,7 @@
                 </a:solidFill>
                 <a:latin typeface="Arial"/>
               </a:rPr>
-              <a:t>Gate 1 — Pydantic (app/schemas.py)</a:t>
+              <a:t>Barrière 1 — Pydantic (app/schemas.py)</a:t>
             </a:r>
             <a:r>
               <a:rPr sz="1300" b="0" i="0">
@@ -14564,11 +14573,11 @@
                 <a:latin typeface="Arial"/>
               </a:rPr>
               <a:t>
-Guards the HTTP door
-Unknown category, negative salary,
-missing field, computed feature sent
-→ HTTP 422 with a clear message
-→ the model is never called</a:t>
+Protège la porte HTTP
+Catégorie inconnue, salaire négatif,
+champ manquant, feature calculée envoyée
+→ HTTP 422 avec un message clair
+→ le modèle n'est jamais appelé</a:t>
             </a:r>
           </a:p>
         </p:txBody>
@@ -14623,7 +14632,7 @@
                 </a:solidFill>
                 <a:latin typeface="Arial"/>
               </a:rPr>
-              <a:t>Gate 2 — PostgreSQL (db/models.py)</a:t>
+              <a:t>Barrière 2 — PostgreSQL (db/models.py)</a:t>
             </a:r>
             <a:r>
               <a:rPr sz="1300" b="0" i="0">
@@ -14633,11 +14642,11 @@
                 <a:latin typeface="Arial"/>
               </a:rPr>
               <a:t>
-Guards the database door
+Protège la porte de la base
 CHECK, NOT NULL, UNIQUE,
-foreign keys
-→ the write is refused
-→ protects every entry point</a:t>
+clés étrangères
+→ l'écriture est refusée
+→ protège toutes les entrées</a:t>
             </a:r>
           </a:p>
         </p:txBody>
@@ -14676,7 +14685,7 @@
                 </a:solidFill>
                 <a:latin typeface="Arial"/>
               </a:rPr>
-              <a:t>•  Why both? Pydantic only protects the API. The CSV import, a script or a manual SQL query bypass it</a:t>
+              <a:t>•  Pourquoi les deux ? Pydantic ne protège que l'API : l'import CSV, un script ou une requête SQL manuelle la contournent</a:t>
             </a:r>
           </a:p>
           <a:p>
@@ -14692,7 +14701,7 @@
                 </a:solidFill>
                 <a:latin typeface="Arial"/>
               </a:rPr>
-              <a:t>•  The allowed values are exactly </a:t>
+              <a:t>•  Les valeurs autorisées sont exactement </a:t>
             </a:r>
             <a:r>
               <a:rPr sz="1500" b="1" i="0">
@@ -14701,7 +14710,7 @@
                 </a:solidFill>
                 <a:latin typeface="Arial"/>
               </a:rPr>
-              <a:t>the categories the model saw during training</a:t>
+              <a:t>les catégories vues à l'entraînement</a:t>
             </a:r>
           </a:p>
         </p:txBody>
@@ -14753,7 +14762,7 @@
                 </a:solidFill>
                 <a:latin typeface="Arial"/>
               </a:rPr>
-              <a:t>Database schema</a:t>
+              <a:t>Schéma de la base de données</a:t>
             </a:r>
           </a:p>
         </p:txBody>
@@ -14831,7 +14840,7 @@
                 </a:solidFill>
                 <a:latin typeface="Arial"/>
               </a:rPr>
-              <a:t>6 tables, 2 groups — full UML in docs/db_schema.md</a:t>
+              <a:t>6 tables, 2 groupes — UML complet dans docs/db_schema.md</a:t>
             </a:r>
           </a:p>
         </p:txBody>
@@ -14865,7 +14874,7 @@
                 </a:solidFill>
                 <a:latin typeface="Arial"/>
               </a:rPr>
-              <a:t>Futurisys — Deploying an ML model in production</a:t>
+              <a:t>Futurisys — mise en production d'un modèle de ML</a:t>
             </a:r>
           </a:p>
         </p:txBody>
@@ -14962,7 +14971,7 @@
                 </a:solidFill>
                 <a:latin typeface="Arial"/>
               </a:rPr>
-              <a:t> (loaded once)</a:t>
+              <a:t> (chargé une fois)</a:t>
             </a:r>
           </a:p>
         </p:txBody>
@@ -15018,9 +15027,9 @@
                 <a:latin typeface="Arial"/>
               </a:rPr>
               <a:t>employee  1 ── 1  evaluation
-employee  1 ── 1  sondage  (target)
-joined by id_employee
-1 470 rows each</a:t>
+employee  1 ── 1  sondage  (cible)
+jointes par id_employee
+1 470 lignes chacune</a:t>
             </a:r>
           </a:p>
         </p:txBody>
@@ -15073,7 +15082,7 @@
                 </a:solidFill>
                 <a:latin typeface="Arial"/>
               </a:rPr>
-              <a:t>TRACEABILITY</a:t>
+              <a:t>TRAÇABILITÉ</a:t>
             </a:r>
             <a:r>
               <a:rPr sz="1300" b="1" i="0">
@@ -15082,7 +15091,7 @@
                 </a:solidFill>
                 <a:latin typeface="Arial"/>
               </a:rPr>
-              <a:t> (grows with every call)</a:t>
+              <a:t> (grandit à chaque appel)</a:t>
             </a:r>
           </a:p>
         </p:txBody>
@@ -15139,8 +15148,8 @@
               </a:rPr>
               <a:t>prediction_input  1 ── 0..1  prediction_output
 model_version  1 ── *  prediction_output
-one output per input (UNIQUE)
-deleting data never erases history</a:t>
+un seul output par input (UNIQUE)
+supprimer des données n'efface pas l'historique</a:t>
             </a:r>
           </a:p>
         </p:txBody>
@@ -15188,7 +15197,7 @@
                 </a:solidFill>
                 <a:latin typeface="Arial"/>
               </a:rPr>
-              <a:t>Raw data only</a:t>
+              <a:t>Données brutes uniquement</a:t>
             </a:r>
             <a:r>
               <a:rPr sz="1500" b="0" i="0">
@@ -15197,7 +15206,7 @@
                 </a:solidFill>
                 <a:latin typeface="Arial"/>
               </a:rPr>
-              <a:t> — engineered features are recomputed, never stored (no contradictions)</a:t>
+              <a:t> — les features calculées sont recalculées, jamais stockées (pas de contradiction possible)</a:t>
             </a:r>
           </a:p>
           <a:p>
@@ -15222,7 +15231,7 @@
                 </a:solidFill>
                 <a:latin typeface="Arial"/>
               </a:rPr>
-              <a:t>Typed columns, not JSON</a:t>
+              <a:t>Colonnes typées plutôt qu'un JSON</a:t>
             </a:r>
             <a:r>
               <a:rPr sz="1500" b="0" i="0">
@@ -15231,7 +15240,7 @@
                 </a:solidFill>
                 <a:latin typeface="Arial"/>
               </a:rPr>
-              <a:t> — the database can reject bad values and the data stays queryable</a:t>
+              <a:t> — la base refuse les valeurs invalides et les données restent interrogeables</a:t>
             </a:r>
           </a:p>
           <a:p>
@@ -15256,7 +15265,7 @@
                 </a:solidFill>
                 <a:latin typeface="Arial"/>
               </a:rPr>
-              <a:t>VARCHAR + CHECK rather than PostgreSQL ENUM</a:t>
+              <a:t>VARCHAR + CHECK plutôt qu'un ENUM PostgreSQL</a:t>
             </a:r>
             <a:r>
               <a:rPr sz="1500" b="0" i="0">
@@ -15265,7 +15274,7 @@
                 </a:solidFill>
                 <a:latin typeface="Arial"/>
               </a:rPr>
-              <a:t> — same safety, far easier to evolve</a:t>
+              <a:t> — même sécurité, bien plus simple à faire évoluer</a:t>
             </a:r>
           </a:p>
         </p:txBody>
